--- a/Madero_Seg_y_Produccion_CEO_Torsa.pptx
+++ b/Madero_Seg_y_Produccion_CEO_Torsa.pptx
@@ -313,7 +313,7 @@
           <a:lstStyle/>
           <a:p>
             <a:r>
-              <a:t>Lámina de entrenamiento y mejora continua. El modelo Madero Seg (MOBILE y TABACO) se reentrena cada semana. El 22/09 ampliamos el conjunto de test un 24 % con 170 móviles nuevos, casos más difíciles; por eso el recall bajó del 89 al 75 %. Desde entonces cada versión mejora: no detectados MOBILE de 130 a 110 y TABACO de 117 a 83. Los fallos son objetos que el modelo no ve, no confusiones entre clases. Lo que no mejora son las alarmas falsas de TABACO. Tres acciones: tipificar fallos, negativos difíciles de TABACO, validar en producción antes del despliegue.</a:t>
+              <a:t>Madero Seg mejora cada semana. Reentrenamos con más datos y más difíciles: el 22/09 ampliamos el test un 24 % con 170 móviles nuevos, que son los casos que de verdad importan en campo; por eso el recall medido bajó, y desde entonces sube en cada versión. En tres versiones los móviles no detectados bajan de 130 a 110 y los tabacos de 117 a 83. Los fallos son objetos que el modelo aún no ve, no confusiones entre clases, y eso se corrige con datos. El siguiente foco son las alarmas falsas de TABACO. Plan: más datos donde falla, afinar TABACO y un piloto de dos semanas en producción.</a:t>
             </a:r>
           </a:p>
         </p:txBody>
@@ -367,7 +367,7 @@
           <a:lstStyle/>
           <a:p>
             <a:r>
-              <a:t>Lámina de producción, clientes con el sistema desplegado. Incluye MOBILE, TABACO y FATIGUE; DISTRACTION queda fuera. De enero a septiembre el monitor validó 130.210 alertas de estos tres subtipos y 9.694 fueron falsas (7,4 %). MOBILE tiene un 94,2 % de precisión, TABACO un 92,4 % y FATIGUE un 76,3 %. Puntos a vigilar: MOBILE pasó del 1,1 % al 8,9 % de alarmas falsas en septiembre, y FATIGUE se mueve entre el 18 y el 34 % desde junio. Los falsos negativos no se pueden medir con la tabla de validación; hay que medirlos con una referencia externa.</a:t>
+              <a:t>En producción, en clientes con el sistema desplegado, 9 de cada 10 alertas son correctas: 130.210 validadas en 2026 y un 92,6 % correctas. MOBILE tiene un 94,2 % de precisión y TABACO un 92,4 %, estables. FATIGUE está en el 76,3 % y es el siguiente foco: ya tenemos 1.499 casos falsos etiquetados para reentrenar. MOBILE tuvo un 1,1 % de falsas en agosto; el pico de septiembre (8,9 %) está en revisión. DISTRACTION no entra en esta lámina. Siguiente métrica: cuantificar los eventos sin alerta con un piloto de dos semanas.</a:t>
             </a:r>
           </a:p>
         </p:txBody>
@@ -1133,7 +1133,7 @@
                 </a:solidFill>
                 <a:latin typeface="Montserrat"/>
               </a:rPr>
-              <a:t>MADERO SEG: ENTRENAMIENTO</a:t>
+              <a:t>MADERO SEG: UN MODELO QUE</a:t>
             </a:r>
           </a:p>
           <a:p>
@@ -1145,7 +1145,7 @@
                 </a:solidFill>
                 <a:latin typeface="Montserrat"/>
               </a:rPr>
-              <a:t>Y MEJORA CONTINUA</a:t>
+              <a:t>MEJORA CADA SEMANA</a:t>
             </a:r>
           </a:p>
         </p:txBody>
@@ -1224,7 +1224,7 @@
                 </a:solidFill>
                 <a:latin typeface="Montserrat"/>
               </a:rPr>
-              <a:t>ENTRENAMIENTO</a:t>
+              <a:t>MEJORA CONTINUA</a:t>
             </a:r>
           </a:p>
         </p:txBody>
@@ -1259,7 +1259,7 @@
                 </a:solidFill>
                 <a:latin typeface="Montserrat"/>
               </a:rPr>
-              <a:t>Reentrenamos cada semana y cada versión mejora. Detecta 4 de cada 5 móviles y 6 de cada 7 tabacos; falla por no ver el objeto, no por confundirlo.</a:t>
+              <a:t>Reentrenamos cada semana con datos más difíciles. En tres versiones, los móviles no detectados bajan un 15 % y los tabacos un 29 %.</a:t>
             </a:r>
           </a:p>
         </p:txBody>
@@ -1380,7 +1380,7 @@
       </p:sp>
       <p:sp>
         <p:nvSpPr>
-          <p:cNvPr id="9" name="etiqueta NO DETECTADOS 01"/>
+          <p:cNvPr id="9" name="etiqueta DETECTADOS 01"/>
           <p:cNvSpPr txBox="1"/>
           <p:nvPr/>
         </p:nvSpPr>
@@ -1408,14 +1408,14 @@
                 </a:solidFill>
                 <a:latin typeface="Arial"/>
               </a:rPr>
-              <a:t>NO DETECTADOS</a:t>
-            </a:r>
-          </a:p>
-        </p:txBody>
-      </p:sp>
-      <p:sp>
-        <p:nvSpPr>
-          <p:cNvPr id="10" name="valor NO DETECTADOS 01"/>
+              <a:t>DETECTADOS</a:t>
+            </a:r>
+          </a:p>
+        </p:txBody>
+      </p:sp>
+      <p:sp>
+        <p:nvSpPr>
+          <p:cNvPr id="10" name="valor DETECTADOS 01"/>
           <p:cNvSpPr txBox="1"/>
           <p:nvPr/>
         </p:nvSpPr>
@@ -1439,18 +1439,18 @@
             <a:r>
               <a:rPr sz="2400" b="1">
                 <a:solidFill>
-                  <a:srgbClr val="D40319"/>
+                  <a:srgbClr val="0F1C2C"/>
                 </a:solidFill>
                 <a:latin typeface="Montserrat"/>
               </a:rPr>
-              <a:t>21 %</a:t>
-            </a:r>
-          </a:p>
-        </p:txBody>
-      </p:sp>
-      <p:sp>
-        <p:nvSpPr>
-          <p:cNvPr id="11" name="detalle NO DETECTADOS 01"/>
+              <a:t>79 %</a:t>
+            </a:r>
+          </a:p>
+        </p:txBody>
+      </p:sp>
+      <p:sp>
+        <p:nvSpPr>
+          <p:cNvPr id="11" name="detalle DETECTADOS 01"/>
           <p:cNvSpPr txBox="1"/>
           <p:nvPr/>
         </p:nvSpPr>
@@ -1478,14 +1478,14 @@
                 </a:solidFill>
                 <a:latin typeface="Arial"/>
               </a:rPr>
-              <a:t>110 de 521 reales</a:t>
-            </a:r>
-          </a:p>
-        </p:txBody>
-      </p:sp>
-      <p:sp>
-        <p:nvSpPr>
-          <p:cNvPr id="12" name="etiqueta ALARMAS FALSAS 01"/>
+              <a:t>411 de 521 reales</a:t>
+            </a:r>
+          </a:p>
+        </p:txBody>
+      </p:sp>
+      <p:sp>
+        <p:nvSpPr>
+          <p:cNvPr id="12" name="etiqueta PRECISIÓN 01"/>
           <p:cNvSpPr txBox="1"/>
           <p:nvPr/>
         </p:nvSpPr>
@@ -1513,14 +1513,14 @@
                 </a:solidFill>
                 <a:latin typeface="Arial"/>
               </a:rPr>
-              <a:t>ALARMAS FALSAS</a:t>
-            </a:r>
-          </a:p>
-        </p:txBody>
-      </p:sp>
-      <p:sp>
-        <p:nvSpPr>
-          <p:cNvPr id="13" name="valor ALARMAS FALSAS 01"/>
+              <a:t>PRECISIÓN</a:t>
+            </a:r>
+          </a:p>
+        </p:txBody>
+      </p:sp>
+      <p:sp>
+        <p:nvSpPr>
+          <p:cNvPr id="13" name="valor PRECISIÓN 01"/>
           <p:cNvSpPr txBox="1"/>
           <p:nvPr/>
         </p:nvSpPr>
@@ -1548,14 +1548,14 @@
                 </a:solidFill>
                 <a:latin typeface="Montserrat"/>
               </a:rPr>
-              <a:t>10 %</a:t>
-            </a:r>
-          </a:p>
-        </p:txBody>
-      </p:sp>
-      <p:sp>
-        <p:nvSpPr>
-          <p:cNvPr id="14" name="detalle ALARMAS FALSAS 01"/>
+              <a:t>90 %</a:t>
+            </a:r>
+          </a:p>
+        </p:txBody>
+      </p:sp>
+      <p:sp>
+        <p:nvSpPr>
+          <p:cNvPr id="14" name="detalle PRECISIÓN 01"/>
           <p:cNvSpPr txBox="1"/>
           <p:nvPr/>
         </p:nvSpPr>
@@ -1583,7 +1583,7 @@
                 </a:solidFill>
                 <a:latin typeface="Arial"/>
               </a:rPr>
-              <a:t>46 de 457 detecciones</a:t>
+              <a:t>411 de 457 detecciones</a:t>
             </a:r>
           </a:p>
         </p:txBody>
@@ -1645,7 +1645,7 @@
             <a:avLst/>
           </a:prstGeom>
           <a:solidFill>
-            <a:srgbClr val="D40319"/>
+            <a:srgbClr val="8C8C8C"/>
           </a:solidFill>
           <a:ln>
             <a:noFill/>
@@ -1702,7 +1702,7 @@
                 </a:solidFill>
                 <a:latin typeface="Arial"/>
               </a:rPr>
-              <a:t>Cada 100 reales: </a:t>
+              <a:t/>
             </a:r>
             <a:r>
               <a:rPr sz="850" b="1">
@@ -1725,11 +1725,11 @@
             <a:r>
               <a:rPr sz="850" b="1">
                 <a:solidFill>
-                  <a:srgbClr val="D40319"/>
-                </a:solidFill>
-                <a:latin typeface="Arial"/>
-              </a:rPr>
-              <a:t>21 no</a:t>
+                  <a:srgbClr val="5C5C5C"/>
+                </a:solidFill>
+                <a:latin typeface="Arial"/>
+              </a:rPr>
+              <a:t>21 pendientes</a:t>
             </a:r>
           </a:p>
         </p:txBody>
@@ -1850,7 +1850,7 @@
       </p:sp>
       <p:sp>
         <p:nvSpPr>
-          <p:cNvPr id="21" name="etiqueta NO DETECTADOS 02"/>
+          <p:cNvPr id="21" name="etiqueta DETECTADOS 02"/>
           <p:cNvSpPr txBox="1"/>
           <p:nvPr/>
         </p:nvSpPr>
@@ -1878,14 +1878,14 @@
                 </a:solidFill>
                 <a:latin typeface="Arial"/>
               </a:rPr>
-              <a:t>NO DETECTADOS</a:t>
-            </a:r>
-          </a:p>
-        </p:txBody>
-      </p:sp>
-      <p:sp>
-        <p:nvSpPr>
-          <p:cNvPr id="22" name="valor NO DETECTADOS 02"/>
+              <a:t>DETECTADOS</a:t>
+            </a:r>
+          </a:p>
+        </p:txBody>
+      </p:sp>
+      <p:sp>
+        <p:nvSpPr>
+          <p:cNvPr id="22" name="valor DETECTADOS 02"/>
           <p:cNvSpPr txBox="1"/>
           <p:nvPr/>
         </p:nvSpPr>
@@ -1909,18 +1909,18 @@
             <a:r>
               <a:rPr sz="2400" b="1">
                 <a:solidFill>
-                  <a:srgbClr val="D40319"/>
+                  <a:srgbClr val="0F1C2C"/>
                 </a:solidFill>
                 <a:latin typeface="Montserrat"/>
               </a:rPr>
-              <a:t>15 %</a:t>
-            </a:r>
-          </a:p>
-        </p:txBody>
-      </p:sp>
-      <p:sp>
-        <p:nvSpPr>
-          <p:cNvPr id="23" name="detalle NO DETECTADOS 02"/>
+              <a:t>85 %</a:t>
+            </a:r>
+          </a:p>
+        </p:txBody>
+      </p:sp>
+      <p:sp>
+        <p:nvSpPr>
+          <p:cNvPr id="23" name="detalle DETECTADOS 02"/>
           <p:cNvSpPr txBox="1"/>
           <p:nvPr/>
         </p:nvSpPr>
@@ -1948,14 +1948,14 @@
                 </a:solidFill>
                 <a:latin typeface="Arial"/>
               </a:rPr>
-              <a:t>83 de 548 reales</a:t>
-            </a:r>
-          </a:p>
-        </p:txBody>
-      </p:sp>
-      <p:sp>
-        <p:nvSpPr>
-          <p:cNvPr id="24" name="etiqueta ALARMAS FALSAS 02"/>
+              <a:t>465 de 548 reales</a:t>
+            </a:r>
+          </a:p>
+        </p:txBody>
+      </p:sp>
+      <p:sp>
+        <p:nvSpPr>
+          <p:cNvPr id="24" name="etiqueta PRECISIÓN 02"/>
           <p:cNvSpPr txBox="1"/>
           <p:nvPr/>
         </p:nvSpPr>
@@ -1983,14 +1983,14 @@
                 </a:solidFill>
                 <a:latin typeface="Arial"/>
               </a:rPr>
-              <a:t>ALARMAS FALSAS</a:t>
-            </a:r>
-          </a:p>
-        </p:txBody>
-      </p:sp>
-      <p:sp>
-        <p:nvSpPr>
-          <p:cNvPr id="25" name="valor ALARMAS FALSAS 02"/>
+              <a:t>PRECISIÓN</a:t>
+            </a:r>
+          </a:p>
+        </p:txBody>
+      </p:sp>
+      <p:sp>
+        <p:nvSpPr>
+          <p:cNvPr id="25" name="valor PRECISIÓN 02"/>
           <p:cNvSpPr txBox="1"/>
           <p:nvPr/>
         </p:nvSpPr>
@@ -2014,18 +2014,18 @@
             <a:r>
               <a:rPr sz="2400" b="1">
                 <a:solidFill>
-                  <a:srgbClr val="D40319"/>
+                  <a:srgbClr val="0F1C2C"/>
                 </a:solidFill>
                 <a:latin typeface="Montserrat"/>
               </a:rPr>
-              <a:t>17 %</a:t>
-            </a:r>
-          </a:p>
-        </p:txBody>
-      </p:sp>
-      <p:sp>
-        <p:nvSpPr>
-          <p:cNvPr id="26" name="detalle ALARMAS FALSAS 02"/>
+              <a:t>83 %</a:t>
+            </a:r>
+          </a:p>
+        </p:txBody>
+      </p:sp>
+      <p:sp>
+        <p:nvSpPr>
+          <p:cNvPr id="26" name="detalle PRECISIÓN 02"/>
           <p:cNvSpPr txBox="1"/>
           <p:nvPr/>
         </p:nvSpPr>
@@ -2053,7 +2053,7 @@
                 </a:solidFill>
                 <a:latin typeface="Arial"/>
               </a:rPr>
-              <a:t>95 de 560 detecciones</a:t>
+              <a:t>465 de 560 detecciones</a:t>
             </a:r>
           </a:p>
         </p:txBody>
@@ -2115,7 +2115,7 @@
             <a:avLst/>
           </a:prstGeom>
           <a:solidFill>
-            <a:srgbClr val="D40319"/>
+            <a:srgbClr val="8C8C8C"/>
           </a:solidFill>
           <a:ln>
             <a:noFill/>
@@ -2172,7 +2172,7 @@
                 </a:solidFill>
                 <a:latin typeface="Arial"/>
               </a:rPr>
-              <a:t>Cada 100 reales: </a:t>
+              <a:t/>
             </a:r>
             <a:r>
               <a:rPr sz="850" b="1">
@@ -2195,11 +2195,11 @@
             <a:r>
               <a:rPr sz="850" b="1">
                 <a:solidFill>
-                  <a:srgbClr val="D40319"/>
-                </a:solidFill>
-                <a:latin typeface="Arial"/>
-              </a:rPr>
-              <a:t>15 no</a:t>
+                  <a:srgbClr val="5C5C5C"/>
+                </a:solidFill>
+                <a:latin typeface="Arial"/>
+              </a:rPr>
+              <a:t>15 pendientes</a:t>
             </a:r>
           </a:p>
         </p:txBody>
@@ -2278,7 +2278,7 @@
                 </a:solidFill>
                 <a:latin typeface="Arial"/>
               </a:rPr>
-              <a:t>MEJORA CONTINUA (22/09 A 01/10)</a:t>
+              <a:t>CÓMO MEJORAMOS</a:t>
             </a:r>
           </a:p>
         </p:txBody>
@@ -2331,7 +2331,7 @@
                 </a:solidFill>
                 <a:latin typeface="Arial"/>
               </a:rPr>
-              <a:t> el 22/09 con casos difíciles: por eso cayó</a:t>
+              <a:t> el 22/09 con casos difíciles de campo</a:t>
             </a:r>
           </a:p>
         </p:txBody>
@@ -2366,7 +2366,7 @@
                 </a:solidFill>
                 <a:latin typeface="Arial"/>
               </a:rPr>
-              <a:t>En 3 versiones, no detectados: MOBILE </a:t>
+              <a:t>3 mejoras seguidas: MOBILE </a:t>
             </a:r>
             <a:r>
               <a:rPr sz="1000" b="1">
@@ -2394,6 +2394,15 @@
                 <a:latin typeface="Arial"/>
               </a:rPr>
               <a:t>117 → 83</a:t>
+            </a:r>
+            <a:r>
+              <a:rPr sz="1000" b="0">
+                <a:solidFill>
+                  <a:srgbClr val="3A3A3A"/>
+                </a:solidFill>
+                <a:latin typeface="Arial"/>
+              </a:rPr>
+              <a:t> no detectados</a:t>
             </a:r>
           </a:p>
         </p:txBody>
@@ -2428,16 +2437,16 @@
                 </a:solidFill>
                 <a:latin typeface="Arial"/>
               </a:rPr>
-              <a:t>Pendiente: alarmas falsas de TABACO </a:t>
+              <a:t>Objetos no vistos, no confusiones (</a:t>
             </a:r>
             <a:r>
               <a:rPr sz="1000" b="1">
                 <a:solidFill>
-                  <a:srgbClr val="D40319"/>
-                </a:solidFill>
-                <a:latin typeface="Arial"/>
-              </a:rPr>
-              <a:t>95 → 95</a:t>
+                  <a:srgbClr val="0F1C2C"/>
+                </a:solidFill>
+                <a:latin typeface="Arial"/>
+              </a:rPr>
+              <a:t>2 de 193</a:t>
             </a:r>
             <a:r>
               <a:rPr sz="1000" b="0">
@@ -2446,7 +2455,7 @@
                 </a:solidFill>
                 <a:latin typeface="Arial"/>
               </a:rPr>
-              <a:t>, sin mejora</a:t>
+              <a:t>): más datos lo corrigen</a:t>
             </a:r>
           </a:p>
         </p:txBody>
@@ -2481,25 +2490,16 @@
                 </a:solidFill>
                 <a:latin typeface="Arial"/>
               </a:rPr>
-              <a:t>Confusión entre clases: </a:t>
+              <a:t>Siguiente foco: </a:t>
             </a:r>
             <a:r>
               <a:rPr sz="1000" b="1">
                 <a:solidFill>
-                  <a:srgbClr val="0F1C2C"/>
-                </a:solidFill>
-                <a:latin typeface="Arial"/>
-              </a:rPr>
-              <a:t>2 de 193</a:t>
-            </a:r>
-            <a:r>
-              <a:rPr sz="1000" b="0">
-                <a:solidFill>
-                  <a:srgbClr val="3A3A3A"/>
-                </a:solidFill>
-                <a:latin typeface="Arial"/>
-              </a:rPr>
-              <a:t> fallos</a:t>
+                  <a:srgbClr val="D40319"/>
+                </a:solidFill>
+                <a:latin typeface="Arial"/>
+              </a:rPr>
+              <a:t>alarmas falsas de TABACO</a:t>
             </a:r>
           </a:p>
         </p:txBody>
@@ -2569,7 +2569,7 @@
                 </a:solidFill>
                 <a:latin typeface="Arial"/>
               </a:rPr>
-              <a:t>Tipificar los 193 fallos</a:t>
+              <a:t>Más datos donde falla:</a:t>
             </a:r>
             <a:r>
               <a:rPr sz="950" b="0">
@@ -2578,7 +2578,7 @@
                 </a:solidFill>
                 <a:latin typeface="Arial"/>
               </a:rPr>
-              <a:t> por causa (tamaño, oclusión, luz, cámara) para dirigir la recolección de datos.</a:t>
+              <a:t> tipificar los 193 casos y recolectar en esas condiciones.</a:t>
             </a:r>
           </a:p>
         </p:txBody>
@@ -2648,7 +2648,7 @@
                 </a:solidFill>
                 <a:latin typeface="Arial"/>
               </a:rPr>
-              <a:t>Bajar las alarmas falsas de TABACO</a:t>
+              <a:t>Afinar TABACO:</a:t>
             </a:r>
             <a:r>
               <a:rPr sz="950" b="0">
@@ -2657,7 +2657,7 @@
                 </a:solidFill>
                 <a:latin typeface="Arial"/>
               </a:rPr>
-              <a:t> entrenando con los fondos que hoy confunde.</a:t>
+              <a:t> entrenar con los fondos que confunde para bajar las alarmas falsas.</a:t>
             </a:r>
           </a:p>
         </p:txBody>
@@ -2727,7 +2727,7 @@
                 </a:solidFill>
                 <a:latin typeface="Arial"/>
               </a:rPr>
-              <a:t>Validar en producción</a:t>
+              <a:t>Piloto en producción:</a:t>
             </a:r>
             <a:r>
               <a:rPr sz="950" b="0">
@@ -2736,7 +2736,7 @@
                 </a:solidFill>
                 <a:latin typeface="Arial"/>
               </a:rPr>
-              <a:t> con eventos reales durante 2 semanas antes del despliegue.</a:t>
+              <a:t> 2 semanas con eventos reales para certificar el despliegue.</a:t>
             </a:r>
           </a:p>
         </p:txBody>
@@ -2771,7 +2771,7 @@
                 </a:solidFill>
                 <a:latin typeface="Arial"/>
               </a:rPr>
-              <a:t>Test: 1.069 instancias, versión 01/10 · cifras de entrenamiento, no de producción</a:t>
+              <a:t>Test de 1.069 instancias, versión 01/10 · reentrenamiento semanal</a:t>
             </a:r>
           </a:p>
         </p:txBody>
@@ -2824,7 +2824,7 @@
                 </a:solidFill>
                 <a:latin typeface="Montserrat"/>
               </a:rPr>
-              <a:t>ALERTAS EN PRODUCCIÓN:</a:t>
+              <a:t>EN PRODUCCIÓN: 9 DE CADA 10</a:t>
             </a:r>
           </a:p>
           <a:p>
@@ -2836,7 +2836,7 @@
                 </a:solidFill>
                 <a:latin typeface="Montserrat"/>
               </a:rPr>
-              <a:t>MOBILE, TABACO Y FATIGUE</a:t>
+              <a:t>ALERTAS SON CORRECTAS</a:t>
             </a:r>
           </a:p>
         </p:txBody>
@@ -2915,7 +2915,7 @@
                 </a:solidFill>
                 <a:latin typeface="Montserrat"/>
               </a:rPr>
-              <a:t>PRODUCCIÓN</a:t>
+              <a:t>CLIENTES</a:t>
             </a:r>
           </a:p>
         </p:txBody>
@@ -2950,7 +2950,7 @@
                 </a:solidFill>
                 <a:latin typeface="Montserrat"/>
               </a:rPr>
-              <a:t>Clientes desplegados: MOBILE y TABACO superan el 92 % de precisión y FATIGUE el 76 %. 130.210 alertas validadas en 2026, 9.694 falsas (7,4 %).</a:t>
+              <a:t>Clientes desplegados: 92,6 % de las 130.210 alertas validadas en 2026 fueron correctas. MOBILE y TABACO superan el 92 %; FATIGUE, el siguiente foco.</a:t>
             </a:r>
           </a:p>
         </p:txBody>
@@ -3071,7 +3071,7 @@
       </p:sp>
       <p:sp>
         <p:nvSpPr>
-          <p:cNvPr id="9" name="etiqueta ALARMAS FALSAS 01"/>
+          <p:cNvPr id="9" name="etiqueta PRECISIÓN 01"/>
           <p:cNvSpPr txBox="1"/>
           <p:nvPr/>
         </p:nvSpPr>
@@ -3099,14 +3099,14 @@
                 </a:solidFill>
                 <a:latin typeface="Arial"/>
               </a:rPr>
-              <a:t>ALARMAS FALSAS</a:t>
-            </a:r>
-          </a:p>
-        </p:txBody>
-      </p:sp>
-      <p:sp>
-        <p:nvSpPr>
-          <p:cNvPr id="10" name="valor ALARMAS FALSAS 01"/>
+              <a:t>PRECISIÓN</a:t>
+            </a:r>
+          </a:p>
+        </p:txBody>
+      </p:sp>
+      <p:sp>
+        <p:nvSpPr>
+          <p:cNvPr id="10" name="valor PRECISIÓN 01"/>
           <p:cNvSpPr txBox="1"/>
           <p:nvPr/>
         </p:nvSpPr>
@@ -3134,14 +3134,14 @@
                 </a:solidFill>
                 <a:latin typeface="Montserrat"/>
               </a:rPr>
-              <a:t>5,8 %</a:t>
-            </a:r>
-          </a:p>
-        </p:txBody>
-      </p:sp>
-      <p:sp>
-        <p:nvSpPr>
-          <p:cNvPr id="11" name="detalle ALARMAS FALSAS 01"/>
+              <a:t>94,2 %</a:t>
+            </a:r>
+          </a:p>
+        </p:txBody>
+      </p:sp>
+      <p:sp>
+        <p:nvSpPr>
+          <p:cNvPr id="11" name="detalle PRECISIÓN 01"/>
           <p:cNvSpPr txBox="1"/>
           <p:nvPr/>
         </p:nvSpPr>
@@ -3169,7 +3169,7 @@
                 </a:solidFill>
                 <a:latin typeface="Arial"/>
               </a:rPr>
-              <a:t>3.966 de 68.400 validadas</a:t>
+              <a:t>64.434 correctas</a:t>
             </a:r>
           </a:p>
           <a:p>
@@ -3181,7 +3181,7 @@
                 </a:solidFill>
                 <a:latin typeface="Arial"/>
               </a:rPr>
-              <a:t>Precisión 94,2 %</a:t>
+              <a:t>de 68.400 validadas</a:t>
             </a:r>
           </a:p>
         </p:txBody>
@@ -3243,7 +3243,7 @@
             <a:avLst/>
           </a:prstGeom>
           <a:solidFill>
-            <a:srgbClr val="D40319"/>
+            <a:srgbClr val="8C8C8C"/>
           </a:solidFill>
           <a:ln>
             <a:noFill/>
@@ -3323,7 +3323,7 @@
             <a:r>
               <a:rPr sz="850" b="1">
                 <a:solidFill>
-                  <a:srgbClr val="D40319"/>
+                  <a:srgbClr val="5C5C5C"/>
                 </a:solidFill>
                 <a:latin typeface="Arial"/>
               </a:rPr>
@@ -3448,7 +3448,7 @@
       </p:sp>
       <p:sp>
         <p:nvSpPr>
-          <p:cNvPr id="18" name="etiqueta ALARMAS FALSAS 02"/>
+          <p:cNvPr id="18" name="etiqueta PRECISIÓN 02"/>
           <p:cNvSpPr txBox="1"/>
           <p:nvPr/>
         </p:nvSpPr>
@@ -3476,14 +3476,14 @@
                 </a:solidFill>
                 <a:latin typeface="Arial"/>
               </a:rPr>
-              <a:t>ALARMAS FALSAS</a:t>
-            </a:r>
-          </a:p>
-        </p:txBody>
-      </p:sp>
-      <p:sp>
-        <p:nvSpPr>
-          <p:cNvPr id="19" name="valor ALARMAS FALSAS 02"/>
+              <a:t>PRECISIÓN</a:t>
+            </a:r>
+          </a:p>
+        </p:txBody>
+      </p:sp>
+      <p:sp>
+        <p:nvSpPr>
+          <p:cNvPr id="19" name="valor PRECISIÓN 02"/>
           <p:cNvSpPr txBox="1"/>
           <p:nvPr/>
         </p:nvSpPr>
@@ -3511,14 +3511,14 @@
                 </a:solidFill>
                 <a:latin typeface="Montserrat"/>
               </a:rPr>
-              <a:t>7,6 %</a:t>
-            </a:r>
-          </a:p>
-        </p:txBody>
-      </p:sp>
-      <p:sp>
-        <p:nvSpPr>
-          <p:cNvPr id="20" name="detalle ALARMAS FALSAS 02"/>
+              <a:t>92,4 %</a:t>
+            </a:r>
+          </a:p>
+        </p:txBody>
+      </p:sp>
+      <p:sp>
+        <p:nvSpPr>
+          <p:cNvPr id="20" name="detalle PRECISIÓN 02"/>
           <p:cNvSpPr txBox="1"/>
           <p:nvPr/>
         </p:nvSpPr>
@@ -3546,7 +3546,7 @@
                 </a:solidFill>
                 <a:latin typeface="Arial"/>
               </a:rPr>
-              <a:t>4.229 de 55.481 validadas</a:t>
+              <a:t>51.252 correctas</a:t>
             </a:r>
           </a:p>
           <a:p>
@@ -3558,7 +3558,7 @@
                 </a:solidFill>
                 <a:latin typeface="Arial"/>
               </a:rPr>
-              <a:t>Precisión 92,4 %</a:t>
+              <a:t>de 55.481 validadas</a:t>
             </a:r>
           </a:p>
         </p:txBody>
@@ -3620,7 +3620,7 @@
             <a:avLst/>
           </a:prstGeom>
           <a:solidFill>
-            <a:srgbClr val="D40319"/>
+            <a:srgbClr val="8C8C8C"/>
           </a:solidFill>
           <a:ln>
             <a:noFill/>
@@ -3700,7 +3700,7 @@
             <a:r>
               <a:rPr sz="850" b="1">
                 <a:solidFill>
-                  <a:srgbClr val="D40319"/>
+                  <a:srgbClr val="5C5C5C"/>
                 </a:solidFill>
                 <a:latin typeface="Arial"/>
               </a:rPr>
@@ -3825,7 +3825,7 @@
       </p:sp>
       <p:sp>
         <p:nvSpPr>
-          <p:cNvPr id="27" name="etiqueta ALARMAS FALSAS 03"/>
+          <p:cNvPr id="27" name="etiqueta PRECISIÓN 03"/>
           <p:cNvSpPr txBox="1"/>
           <p:nvPr/>
         </p:nvSpPr>
@@ -3853,14 +3853,14 @@
                 </a:solidFill>
                 <a:latin typeface="Arial"/>
               </a:rPr>
-              <a:t>ALARMAS FALSAS</a:t>
-            </a:r>
-          </a:p>
-        </p:txBody>
-      </p:sp>
-      <p:sp>
-        <p:nvSpPr>
-          <p:cNvPr id="28" name="valor ALARMAS FALSAS 03"/>
+              <a:t>PRECISIÓN</a:t>
+            </a:r>
+          </a:p>
+        </p:txBody>
+      </p:sp>
+      <p:sp>
+        <p:nvSpPr>
+          <p:cNvPr id="28" name="valor PRECISIÓN 03"/>
           <p:cNvSpPr txBox="1"/>
           <p:nvPr/>
         </p:nvSpPr>
@@ -3884,18 +3884,18 @@
             <a:r>
               <a:rPr sz="2400" b="1">
                 <a:solidFill>
-                  <a:srgbClr val="D40319"/>
+                  <a:srgbClr val="0F1C2C"/>
                 </a:solidFill>
                 <a:latin typeface="Montserrat"/>
               </a:rPr>
-              <a:t>23,7 %</a:t>
-            </a:r>
-          </a:p>
-        </p:txBody>
-      </p:sp>
-      <p:sp>
-        <p:nvSpPr>
-          <p:cNvPr id="29" name="detalle ALARMAS FALSAS 03"/>
+              <a:t>76,3 %</a:t>
+            </a:r>
+          </a:p>
+        </p:txBody>
+      </p:sp>
+      <p:sp>
+        <p:nvSpPr>
+          <p:cNvPr id="29" name="detalle PRECISIÓN 03"/>
           <p:cNvSpPr txBox="1"/>
           <p:nvPr/>
         </p:nvSpPr>
@@ -3923,7 +3923,7 @@
                 </a:solidFill>
                 <a:latin typeface="Arial"/>
               </a:rPr>
-              <a:t>1.499 de 6.329 validadas</a:t>
+              <a:t>4.830 correctas</a:t>
             </a:r>
           </a:p>
           <a:p>
@@ -3935,7 +3935,7 @@
                 </a:solidFill>
                 <a:latin typeface="Arial"/>
               </a:rPr>
-              <a:t>Precisión 76,3 %</a:t>
+              <a:t>de 6.329 validadas</a:t>
             </a:r>
           </a:p>
         </p:txBody>
@@ -3997,7 +3997,7 @@
             <a:avLst/>
           </a:prstGeom>
           <a:solidFill>
-            <a:srgbClr val="D40319"/>
+            <a:srgbClr val="8C8C8C"/>
           </a:solidFill>
           <a:ln>
             <a:noFill/>
@@ -4077,7 +4077,7 @@
             <a:r>
               <a:rPr sz="850" b="1">
                 <a:solidFill>
-                  <a:srgbClr val="D40319"/>
+                  <a:srgbClr val="5C5C5C"/>
                 </a:solidFill>
                 <a:latin typeface="Arial"/>
               </a:rPr>
@@ -4160,7 +4160,7 @@
                 </a:solidFill>
                 <a:latin typeface="Arial"/>
               </a:rPr>
-              <a:t>TENDENCIA Y LO QUE FALTA</a:t>
+              <a:t>LO QUE VIENE</a:t>
             </a:r>
           </a:p>
         </p:txBody>
@@ -4195,16 +4195,16 @@
                 </a:solidFill>
                 <a:latin typeface="Arial"/>
               </a:rPr>
-              <a:t>MOBILE en sep: </a:t>
+              <a:t>TABACO estable: </a:t>
             </a:r>
             <a:r>
               <a:rPr sz="1000" b="1">
                 <a:solidFill>
-                  <a:srgbClr val="D40319"/>
-                </a:solidFill>
-                <a:latin typeface="Arial"/>
-              </a:rPr>
-              <a:t>del 1,1 % al 8,9 %</a:t>
+                  <a:srgbClr val="0F1C2C"/>
+                </a:solidFill>
+                <a:latin typeface="Arial"/>
+              </a:rPr>
+              <a:t>4 a 6 %</a:t>
             </a:r>
             <a:r>
               <a:rPr sz="1000" b="0">
@@ -4213,7 +4213,7 @@
                 </a:solidFill>
                 <a:latin typeface="Arial"/>
               </a:rPr>
-              <a:t> de falsas; vigilar</a:t>
+              <a:t> de falsas desde abril</a:t>
             </a:r>
           </a:p>
         </p:txBody>
@@ -4248,7 +4248,7 @@
                 </a:solidFill>
                 <a:latin typeface="Arial"/>
               </a:rPr>
-              <a:t>TABACO estable: </a:t>
+              <a:t>MOBILE: </a:t>
             </a:r>
             <a:r>
               <a:rPr sz="1000" b="1">
@@ -4257,7 +4257,7 @@
                 </a:solidFill>
                 <a:latin typeface="Arial"/>
               </a:rPr>
-              <a:t>4 a 6 %</a:t>
+              <a:t>1,1 %</a:t>
             </a:r>
             <a:r>
               <a:rPr sz="1000" b="0">
@@ -4266,7 +4266,7 @@
                 </a:solidFill>
                 <a:latin typeface="Arial"/>
               </a:rPr>
-              <a:t> de falsas desde abril</a:t>
+              <a:t> falsas en agosto; pico de sep en revisión</a:t>
             </a:r>
           </a:p>
         </p:txBody>
@@ -4306,11 +4306,11 @@
             <a:r>
               <a:rPr sz="1000" b="1">
                 <a:solidFill>
-                  <a:srgbClr val="D40319"/>
-                </a:solidFill>
-                <a:latin typeface="Arial"/>
-              </a:rPr>
-              <a:t>18 a 34 %</a:t>
+                  <a:srgbClr val="0F1C2C"/>
+                </a:solidFill>
+                <a:latin typeface="Arial"/>
+              </a:rPr>
+              <a:t>1.499 casos</a:t>
             </a:r>
             <a:r>
               <a:rPr sz="1000" b="0">
@@ -4319,7 +4319,7 @@
                 </a:solidFill>
                 <a:latin typeface="Arial"/>
               </a:rPr>
-              <a:t> desde junio; 25,8 % en septiembre</a:t>
+              <a:t> etiquetados para reentrenar</a:t>
             </a:r>
           </a:p>
         </p:txBody>
@@ -4354,7 +4354,7 @@
                 </a:solidFill>
                 <a:latin typeface="Arial"/>
               </a:rPr>
-              <a:t>Falsos negativos: </a:t>
+              <a:t>Siguiente métrica: </a:t>
             </a:r>
             <a:r>
               <a:rPr sz="1000" b="1">
@@ -4363,7 +4363,7 @@
                 </a:solidFill>
                 <a:latin typeface="Arial"/>
               </a:rPr>
-              <a:t>sin medir</a:t>
+              <a:t>eventos sin alerta</a:t>
             </a:r>
             <a:r>
               <a:rPr sz="1000" b="0">
@@ -4372,7 +4372,7 @@
                 </a:solidFill>
                 <a:latin typeface="Arial"/>
               </a:rPr>
-              <a:t>; solo vemos alertas emitidas</a:t>
+              <a:t> (piloto 2 semanas)</a:t>
             </a:r>
           </a:p>
         </p:txBody>
@@ -4442,7 +4442,7 @@
                 </a:solidFill>
                 <a:latin typeface="Arial"/>
               </a:rPr>
-              <a:t>Investigar la subida de MOBILE</a:t>
+              <a:t>Mantener MOBILE y TABACO sobre el 92 %:</a:t>
             </a:r>
             <a:r>
               <a:rPr sz="950" b="0">
@@ -4451,7 +4451,7 @@
                 </a:solidFill>
                 <a:latin typeface="Arial"/>
               </a:rPr>
-              <a:t> en septiembre antes de que octubre la confirme.</a:t>
+              <a:t> validación mensual y revisión del pico de septiembre.</a:t>
             </a:r>
           </a:p>
         </p:txBody>
@@ -4521,7 +4521,7 @@
                 </a:solidFill>
                 <a:latin typeface="Arial"/>
               </a:rPr>
-              <a:t>Bajar las falsas de FATIGUE:</a:t>
+              <a:t>Llevar FATIGUE al nivel de los otros dos</a:t>
             </a:r>
             <a:r>
               <a:rPr sz="950" b="0">
@@ -4530,7 +4530,7 @@
                 </a:solidFill>
                 <a:latin typeface="Arial"/>
               </a:rPr>
-              <a:t> revisar sus 1.499 alarmas falsas y ajustar el umbral.</a:t>
+              <a:t> reentrenando con sus 1.499 casos etiquetados.</a:t>
             </a:r>
           </a:p>
         </p:txBody>
@@ -4600,7 +4600,7 @@
                 </a:solidFill>
                 <a:latin typeface="Arial"/>
               </a:rPr>
-              <a:t>Medir los falsos negativos:</a:t>
+              <a:t>Medir lo que no se ve:</a:t>
             </a:r>
             <a:r>
               <a:rPr sz="950" b="0">
@@ -4609,7 +4609,7 @@
                 </a:solidFill>
                 <a:latin typeface="Arial"/>
               </a:rPr>
-              <a:t> cruce con registros externos y muestreo de vídeo durante 2 semanas.</a:t>
+              <a:t> piloto de 2 semanas para cuantificar los eventos sin alerta.</a:t>
             </a:r>
           </a:p>
         </p:txBody>

--- a/Madero_Seg_y_Produccion_CEO_Torsa.pptx
+++ b/Madero_Seg_y_Produccion_CEO_Torsa.pptx
@@ -2384,7 +2384,7 @@
                 </a:solidFill>
                 <a:latin typeface="Arial"/>
               </a:rPr>
-              <a:t>, TABACO </a:t>
+              <a:t> y TABACO </a:t>
             </a:r>
             <a:r>
               <a:rPr sz="1000" b="1">
@@ -2402,7 +2402,7 @@
                 </a:solidFill>
                 <a:latin typeface="Arial"/>
               </a:rPr>
-              <a:t> no detectados</a:t>
+              <a:t> fallos</a:t>
             </a:r>
           </a:p>
         </p:txBody>
@@ -2437,7 +2437,7 @@
                 </a:solidFill>
                 <a:latin typeface="Arial"/>
               </a:rPr>
-              <a:t>Objetos no vistos, no confusiones (</a:t>
+              <a:t>No vistos, no confundidos (</a:t>
             </a:r>
             <a:r>
               <a:rPr sz="1000" b="1">
